--- a/SESION_3/Sesion_3_Controles_avanzados_e_integracion.pptx
+++ b/SESION_3/Sesion_3_Controles_avanzados_e_integracion.pptx
@@ -8,6 +8,7 @@
     <p:sldId id="256" r:id="rId2"/>
     <p:sldId id="257" r:id="rId3"/>
     <p:sldId id="258" r:id="rId4"/>
+    <p:sldId id="281" r:id="rId32"/>
     <p:sldId id="259" r:id="rId5"/>
     <p:sldId id="260" r:id="rId6"/>
     <p:sldId id="261" r:id="rId7"/>
@@ -2046,6 +2047,94 @@
             <a:fld id="{F7021451-1387-4CA6-816F-3879F97B5CBC}" type="slidenum">
               <a:rPr lang="en-US"/>
               <a:t>25</a:t>
+            </a:fld>
+            <a:endParaRPr lang="en-US"/>
+          </a:p>
+        </p:txBody>
+      </p:sp>
+    </p:spTree>
+    <p:extLst>
+      <p:ext uri="{BB962C8B-B14F-4D97-AF65-F5344CB8AC3E}">
+        <p14:creationId xmlns:p14="http://schemas.microsoft.com/office/powerpoint/2010/main" val="1024086991"/>
+      </p:ext>
+    </p:extLst>
+  </p:cSld>
+  <p:clrMapOvr>
+    <a:masterClrMapping/>
+  </p:clrMapOvr>
+</p:notes>
+</file>
+
+<file path=ppt/notesSlides/notesSlide26.xml><?xml version="1.0" encoding="utf-8"?>
+<p:notes xmlns:a="http://schemas.openxmlformats.org/drawingml/2006/main" xmlns:r="http://schemas.openxmlformats.org/officeDocument/2006/relationships" xmlns:p="http://schemas.openxmlformats.org/presentationml/2006/main">
+  <p:cSld>
+    <p:spTree>
+      <p:nvGrpSpPr>
+        <p:cNvPr id="1" name=""/>
+        <p:cNvGrpSpPr/>
+        <p:nvPr/>
+      </p:nvGrpSpPr>
+      <p:grpSpPr>
+        <a:xfrm>
+          <a:off x="0" y="0"/>
+          <a:ext cx="0" cy="0"/>
+          <a:chOff x="0" y="0"/>
+          <a:chExt cx="0" cy="0"/>
+        </a:xfrm>
+      </p:grpSpPr>
+      <p:sp>
+        <p:nvSpPr>
+          <p:cNvPr id="2" name="Slide Image Placeholder 1"/>
+          <p:cNvSpPr>
+            <a:spLocks noGrp="1" noRot="1" noChangeAspect="1"/>
+          </p:cNvSpPr>
+          <p:nvPr>
+            <p:ph type="sldImg"/>
+          </p:nvPr>
+        </p:nvSpPr>
+        <p:spPr/>
+      </p:sp>
+      <p:sp>
+        <p:nvSpPr>
+          <p:cNvPr id="3" name="Notes Placeholder 2"/>
+          <p:cNvSpPr>
+            <a:spLocks noGrp="1"/>
+          </p:cNvSpPr>
+          <p:nvPr>
+            <p:ph type="body" idx="1"/>
+          </p:nvPr>
+        </p:nvSpPr>
+        <p:spPr/>
+        <p:txBody>
+          <a:bodyPr/>
+          <a:lstStyle/>
+          <a:p>
+            <a:r>
+              <a:rPr lang="en-US" dirty="0"/>
+              <a:t>Respuestas. 1) Una columna de elección devuelve un registro con Value y Id, no un texto; el texto está en .Value. Lo mismo pasa con las columnas de persona, que devuelven un registro con DisplayName y Email. 2) Si la fórmula no es delegable, Power Apps solo trae los primeros 500 registros (2.000 como máximo) y filtra en local: se cambia Search por Filter con StartsWith, que sí delega. Preguntar a dos alumnos distintos y no alargarlo más de cinco minutos.</a:t>
+            </a:r>
+            <a:endParaRPr lang="en-US" dirty="0"/>
+          </a:p>
+        </p:txBody>
+      </p:sp>
+      <p:sp>
+        <p:nvSpPr>
+          <p:cNvPr id="4" name="Slide Number Placeholder 3"/>
+          <p:cNvSpPr>
+            <a:spLocks noGrp="1"/>
+          </p:cNvSpPr>
+          <p:nvPr>
+            <p:ph type="sldNum" sz="quarter" idx="10"/>
+          </p:nvPr>
+        </p:nvSpPr>
+        <p:spPr/>
+        <p:txBody>
+          <a:bodyPr/>
+          <a:lstStyle/>
+          <a:p>
+            <a:fld id="{F7021451-1387-4CA6-816F-3879F97B5CBC}" type="slidenum">
+              <a:rPr lang="en-US"/>
+              <a:t>1</a:t>
             </a:fld>
             <a:endParaRPr lang="en-US"/>
           </a:p>
@@ -3958,7 +4047,7 @@
                 <a:ea typeface="Calibri" pitchFamily="34" charset="-122"/>
                 <a:cs typeface="Calibri" pitchFamily="34" charset="-120"/>
               </a:rPr>
-              <a:t>10</a:t>
+              <a:t>11</a:t>
             </a:r>
             <a:endParaRPr lang="en-US" sz="900" dirty="0"/>
           </a:p>
@@ -4415,7 +4504,7 @@
                 <a:ea typeface="Calibri" pitchFamily="34" charset="-122"/>
                 <a:cs typeface="Calibri" pitchFamily="34" charset="-120"/>
               </a:rPr>
-              <a:t>11</a:t>
+              <a:t>12</a:t>
             </a:r>
             <a:endParaRPr lang="en-US" sz="900" dirty="0"/>
           </a:p>
@@ -4855,7 +4944,7 @@
                 <a:ea typeface="Calibri" pitchFamily="34" charset="-122"/>
                 <a:cs typeface="Calibri" pitchFamily="34" charset="-120"/>
               </a:rPr>
-              <a:t>12</a:t>
+              <a:t>13</a:t>
             </a:r>
             <a:endParaRPr lang="en-US" sz="900" dirty="0"/>
           </a:p>
@@ -6177,7 +6266,7 @@
                 <a:ea typeface="Calibri" pitchFamily="34" charset="-122"/>
                 <a:cs typeface="Calibri" pitchFamily="34" charset="-120"/>
               </a:rPr>
-              <a:t>13</a:t>
+              <a:t>14</a:t>
             </a:r>
             <a:endParaRPr lang="en-US" sz="900" dirty="0"/>
           </a:p>
@@ -6782,7 +6871,7 @@
                 <a:ea typeface="Calibri" pitchFamily="34" charset="-122"/>
                 <a:cs typeface="Calibri" pitchFamily="34" charset="-120"/>
               </a:rPr>
-              <a:t>14</a:t>
+              <a:t>15</a:t>
             </a:r>
             <a:endParaRPr lang="en-US" sz="900" dirty="0"/>
           </a:p>
@@ -7243,7 +7332,7 @@
                 <a:ea typeface="Calibri" pitchFamily="34" charset="-122"/>
                 <a:cs typeface="Calibri" pitchFamily="34" charset="-120"/>
               </a:rPr>
-              <a:t>15</a:t>
+              <a:t>16</a:t>
             </a:r>
             <a:endParaRPr lang="en-US" sz="900" dirty="0"/>
           </a:p>
@@ -7431,7 +7520,7 @@
                 <a:ea typeface="Calibri" pitchFamily="34" charset="-122"/>
                 <a:cs typeface="Calibri" pitchFamily="34" charset="-120"/>
               </a:rPr>
-              <a:t>16</a:t>
+              <a:t>17</a:t>
             </a:r>
             <a:endParaRPr lang="en-US" sz="900" dirty="0"/>
           </a:p>
@@ -7750,7 +7839,7 @@
                 <a:ea typeface="Calibri" pitchFamily="34" charset="-122"/>
                 <a:cs typeface="Calibri" pitchFamily="34" charset="-120"/>
               </a:rPr>
-              <a:t>17</a:t>
+              <a:t>18</a:t>
             </a:r>
             <a:endParaRPr lang="en-US" sz="900" dirty="0"/>
           </a:p>
@@ -9205,7 +9294,7 @@
                 <a:ea typeface="Calibri" pitchFamily="34" charset="-122"/>
                 <a:cs typeface="Calibri" pitchFamily="34" charset="-120"/>
               </a:rPr>
-              <a:t>18</a:t>
+              <a:t>19</a:t>
             </a:r>
             <a:endParaRPr lang="en-US" sz="900" dirty="0"/>
           </a:p>
@@ -9569,7 +9658,7 @@
                 <a:ea typeface="Calibri" pitchFamily="34" charset="-122"/>
                 <a:cs typeface="Calibri" pitchFamily="34" charset="-120"/>
               </a:rPr>
-              <a:t>19</a:t>
+              <a:t>20</a:t>
             </a:r>
             <a:endParaRPr lang="en-US" sz="900" dirty="0"/>
           </a:p>
@@ -13534,7 +13623,7 @@
                 <a:ea typeface="Calibri" pitchFamily="34" charset="-122"/>
                 <a:cs typeface="Calibri" pitchFamily="34" charset="-120"/>
               </a:rPr>
-              <a:t>20</a:t>
+              <a:t>21</a:t>
             </a:r>
             <a:endParaRPr lang="en-US" sz="900" dirty="0"/>
           </a:p>
@@ -14095,7 +14184,7 @@
                 <a:ea typeface="Calibri" pitchFamily="34" charset="-122"/>
                 <a:cs typeface="Calibri" pitchFamily="34" charset="-120"/>
               </a:rPr>
-              <a:t>21</a:t>
+              <a:t>22</a:t>
             </a:r>
             <a:endParaRPr lang="en-US" sz="900" dirty="0"/>
           </a:p>
@@ -14634,7 +14723,7 @@
                 <a:ea typeface="Calibri" pitchFamily="34" charset="-122"/>
                 <a:cs typeface="Calibri" pitchFamily="34" charset="-120"/>
               </a:rPr>
-              <a:t>22</a:t>
+              <a:t>23</a:t>
             </a:r>
             <a:endParaRPr lang="en-US" sz="900" dirty="0"/>
           </a:p>
@@ -15322,7 +15411,7 @@
                 <a:ea typeface="Calibri" pitchFamily="34" charset="-122"/>
                 <a:cs typeface="Calibri" pitchFamily="34" charset="-120"/>
               </a:rPr>
-              <a:t>23</a:t>
+              <a:t>24</a:t>
             </a:r>
             <a:endParaRPr lang="en-US" sz="900" dirty="0"/>
           </a:p>
@@ -16010,7 +16099,7 @@
                 <a:ea typeface="Calibri" pitchFamily="34" charset="-122"/>
                 <a:cs typeface="Calibri" pitchFamily="34" charset="-120"/>
               </a:rPr>
-              <a:t>24</a:t>
+              <a:t>25</a:t>
             </a:r>
             <a:endParaRPr lang="en-US" sz="900" dirty="0"/>
           </a:p>
@@ -16579,7 +16668,523 @@
                 <a:ea typeface="Calibri" pitchFamily="34" charset="-122"/>
                 <a:cs typeface="Calibri" pitchFamily="34" charset="-120"/>
               </a:rPr>
-              <a:t>25</a:t>
+              <a:t>26</a:t>
+            </a:r>
+            <a:endParaRPr lang="en-US" sz="900" dirty="0"/>
+          </a:p>
+        </p:txBody>
+      </p:sp>
+    </p:spTree>
+  </p:cSld>
+  <p:clrMapOvr>
+    <a:masterClrMapping/>
+  </p:clrMapOvr>
+</p:sld>
+</file>
+
+<file path=ppt/slides/slide26.xml><?xml version="1.0" encoding="utf-8"?>
+<p:sld xmlns:a="http://schemas.openxmlformats.org/drawingml/2006/main" xmlns:r="http://schemas.openxmlformats.org/officeDocument/2006/relationships" xmlns:p="http://schemas.openxmlformats.org/presentationml/2006/main">
+  <p:cSld name="Slide 3">
+    <p:bg>
+      <p:bgPr>
+        <a:solidFill>
+          <a:srgbClr val="FFFFFF"/>
+        </a:solidFill>
+      </p:bgPr>
+    </p:bg>
+    <p:spTree>
+      <p:nvGrpSpPr>
+        <p:cNvPr id="1" name=""/>
+        <p:cNvGrpSpPr/>
+        <p:nvPr/>
+      </p:nvGrpSpPr>
+      <p:grpSpPr>
+        <a:xfrm>
+          <a:off x="0" y="0"/>
+          <a:ext cx="0" cy="0"/>
+          <a:chOff x="0" y="0"/>
+          <a:chExt cx="0" cy="0"/>
+        </a:xfrm>
+      </p:grpSpPr>
+      <p:sp>
+        <p:nvSpPr>
+          <p:cNvPr id="2" name="Text 0"/>
+          <p:cNvSpPr txBox="1"/>
+          <p:nvPr/>
+        </p:nvSpPr>
+        <p:spPr>
+          <a:xfrm>
+            <a:off x="548640" y="347472"/>
+            <a:ext cx="10058400" cy="274320"/>
+          </a:xfrm>
+          <a:prstGeom prst="rect">
+            <a:avLst/>
+          </a:prstGeom>
+          <a:noFill/>
+          <a:ln/>
+        </p:spPr>
+        <p:txBody>
+          <a:bodyPr wrap="square" lIns="0" tIns="0" rIns="0" bIns="0" rtlCol="0" anchor="ctr"/>
+          <a:lstStyle/>
+          <a:p>
+            <a:pPr indent="0" marL="0">
+              <a:buNone/>
+            </a:pPr>
+            <a:r>
+              <a:rPr lang="en-US" sz="1200" b="1" spc="200" kern="0" dirty="0">
+                <a:solidFill>
+                  <a:srgbClr val="742774"/>
+                </a:solidFill>
+                <a:latin typeface="Calibri" pitchFamily="34" charset="0"/>
+                <a:ea typeface="Calibri" pitchFamily="34" charset="-122"/>
+                <a:cs typeface="Calibri" pitchFamily="34" charset="-120"/>
+              </a:rPr>
+              <a:t>DOS PREGUNTAS</a:t>
+            </a:r>
+            <a:endParaRPr lang="en-US" sz="1200" dirty="0"/>
+          </a:p>
+        </p:txBody>
+      </p:sp>
+      <p:sp>
+        <p:nvSpPr>
+          <p:cNvPr id="3" name="Text 1"/>
+          <p:cNvSpPr txBox="1"/>
+          <p:nvPr/>
+        </p:nvSpPr>
+        <p:spPr>
+          <a:xfrm>
+            <a:off x="548640" y="621792"/>
+            <a:ext cx="11064240" cy="685800"/>
+          </a:xfrm>
+          <a:prstGeom prst="rect">
+            <a:avLst/>
+          </a:prstGeom>
+          <a:noFill/>
+          <a:ln/>
+        </p:spPr>
+        <p:txBody>
+          <a:bodyPr wrap="square" lIns="0" tIns="0" rIns="0" bIns="0" rtlCol="0" anchor="t"/>
+          <a:lstStyle/>
+          <a:p>
+            <a:pPr indent="0" marL="0">
+              <a:buNone/>
+            </a:pPr>
+            <a:r>
+              <a:rPr lang="en-US" sz="3000" b="1" dirty="0">
+                <a:solidFill>
+                  <a:srgbClr val="2E1437"/>
+                </a:solidFill>
+                <a:latin typeface="Cambria" pitchFamily="34" charset="0"/>
+                <a:ea typeface="Cambria" pitchFamily="34" charset="-122"/>
+                <a:cs typeface="Cambria" pitchFamily="34" charset="-120"/>
+              </a:rPr>
+              <a:t>Antes de empezar, de la Sesión 2</a:t>
+            </a:r>
+            <a:endParaRPr lang="en-US" sz="3000" dirty="0"/>
+          </a:p>
+        </p:txBody>
+      </p:sp>
+      <p:sp>
+        <p:nvSpPr>
+          <p:cNvPr id="4" name="Shape 2"/>
+          <p:cNvSpPr/>
+          <p:nvPr/>
+        </p:nvSpPr>
+        <p:spPr>
+          <a:xfrm>
+            <a:off x="548640" y="2148840"/>
+            <a:ext cx="5120640" cy="3383280"/>
+          </a:xfrm>
+          <a:prstGeom prst="roundRect">
+            <a:avLst>
+              <a:gd name="adj" fmla="val 4286"/>
+            </a:avLst>
+          </a:prstGeom>
+          <a:solidFill>
+            <a:srgbClr val="F7F3F8"/>
+          </a:solidFill>
+          <a:ln w="9525">
+            <a:solidFill>
+              <a:srgbClr val="E6DDE9"/>
+            </a:solidFill>
+            <a:prstDash val="solid"/>
+          </a:ln>
+        </p:spPr>
+      </p:sp>
+      <p:sp>
+        <p:nvSpPr>
+          <p:cNvPr id="5" name="Shape 3"/>
+          <p:cNvSpPr/>
+          <p:nvPr/>
+        </p:nvSpPr>
+        <p:spPr>
+          <a:xfrm>
+            <a:off x="822960" y="2423160"/>
+            <a:ext cx="566928" cy="566928"/>
+          </a:xfrm>
+          <a:prstGeom prst="ellipse">
+            <a:avLst/>
+          </a:prstGeom>
+          <a:solidFill>
+            <a:srgbClr val="742774"/>
+          </a:solidFill>
+          <a:ln/>
+        </p:spPr>
+      </p:sp>
+      <p:sp>
+        <p:nvSpPr>
+          <p:cNvPr id="6" name="Text 4"/>
+          <p:cNvSpPr txBox="1"/>
+          <p:nvPr/>
+        </p:nvSpPr>
+        <p:spPr>
+          <a:xfrm>
+            <a:off x="822960" y="2423160"/>
+            <a:ext cx="566928" cy="566928"/>
+          </a:xfrm>
+          <a:prstGeom prst="rect">
+            <a:avLst/>
+          </a:prstGeom>
+          <a:noFill/>
+          <a:ln/>
+        </p:spPr>
+        <p:txBody>
+          <a:bodyPr wrap="square" lIns="0" tIns="0" rIns="0" bIns="0" rtlCol="0" anchor="ctr"/>
+          <a:lstStyle/>
+          <a:p>
+            <a:pPr algn="ctr" indent="0" marL="0">
+              <a:buNone/>
+            </a:pPr>
+            <a:r>
+              <a:rPr lang="en-US" sz="1800" b="1" dirty="0">
+                <a:solidFill>
+                  <a:srgbClr val="FFFFFF"/>
+                </a:solidFill>
+                <a:latin typeface="Cambria" pitchFamily="34" charset="0"/>
+                <a:ea typeface="Cambria" pitchFamily="34" charset="-122"/>
+                <a:cs typeface="Cambria" pitchFamily="34" charset="-120"/>
+              </a:rPr>
+              <a:t>1</a:t>
+            </a:r>
+            <a:endParaRPr lang="en-US" sz="1800" dirty="0"/>
+          </a:p>
+        </p:txBody>
+      </p:sp>
+      <p:sp>
+        <p:nvSpPr>
+          <p:cNvPr id="7" name="Text 5"/>
+          <p:cNvSpPr txBox="1"/>
+          <p:nvPr/>
+        </p:nvSpPr>
+        <p:spPr>
+          <a:xfrm>
+            <a:off x="822960" y="3108960"/>
+            <a:ext cx="4572000" cy="640080"/>
+          </a:xfrm>
+          <a:prstGeom prst="rect">
+            <a:avLst/>
+          </a:prstGeom>
+          <a:noFill/>
+          <a:ln/>
+        </p:spPr>
+        <p:txBody>
+          <a:bodyPr wrap="square" lIns="0" tIns="0" rIns="0" bIns="0" rtlCol="0" anchor="t"/>
+          <a:lstStyle/>
+          <a:p>
+            <a:pPr indent="0" marL="0">
+              <a:buNone/>
+            </a:pPr>
+            <a:r>
+              <a:rPr lang="en-US" sz="1800" b="1" dirty="0">
+                <a:solidFill>
+                  <a:srgbClr val="2E1437"/>
+                </a:solidFill>
+                <a:latin typeface="Cambria" pitchFamily="34" charset="0"/>
+                <a:ea typeface="Cambria" pitchFamily="34" charset="-122"/>
+                <a:cs typeface="Cambria" pitchFamily="34" charset="-120"/>
+              </a:rPr>
+              <a:t>¿Por qué .Value?</a:t>
+            </a:r>
+            <a:endParaRPr lang="en-US" sz="1800" dirty="0"/>
+          </a:p>
+        </p:txBody>
+      </p:sp>
+      <p:sp>
+        <p:nvSpPr>
+          <p:cNvPr id="8" name="Text 6"/>
+          <p:cNvSpPr txBox="1"/>
+          <p:nvPr/>
+        </p:nvSpPr>
+        <p:spPr>
+          <a:xfrm>
+            <a:off x="822960" y="3794760"/>
+            <a:ext cx="4572000" cy="1554480"/>
+          </a:xfrm>
+          <a:prstGeom prst="rect">
+            <a:avLst/>
+          </a:prstGeom>
+          <a:noFill/>
+          <a:ln/>
+        </p:spPr>
+        <p:txBody>
+          <a:bodyPr wrap="square" lIns="0" tIns="0" rIns="0" bIns="0" rtlCol="0" anchor="t"/>
+          <a:lstStyle/>
+          <a:p>
+            <a:pPr indent="0" marL="0">
+              <a:buNone/>
+            </a:pPr>
+            <a:r>
+              <a:rPr lang="en-US" sz="1350" dirty="0">
+                <a:solidFill>
+                  <a:srgbClr val="2B2B33"/>
+                </a:solidFill>
+                <a:latin typeface="Calibri" pitchFamily="34" charset="0"/>
+                <a:ea typeface="Calibri" pitchFamily="34" charset="-122"/>
+                <a:cs typeface="Calibri" pitchFamily="34" charset="-120"/>
+              </a:rPr>
+              <a:t>En la galería pusiste ThisItem.Estado y aparecía un error. ¿Por qué hay que escribir ThisItem.Estado.Value?</a:t>
+            </a:r>
+            <a:endParaRPr lang="en-US" sz="1350" dirty="0"/>
+          </a:p>
+        </p:txBody>
+      </p:sp>
+      <p:sp>
+        <p:nvSpPr>
+          <p:cNvPr id="9" name="Shape 7"/>
+          <p:cNvSpPr/>
+          <p:nvPr/>
+        </p:nvSpPr>
+        <p:spPr>
+          <a:xfrm>
+            <a:off x="6492240" y="2148840"/>
+            <a:ext cx="5120640" cy="3383280"/>
+          </a:xfrm>
+          <a:prstGeom prst="roundRect">
+            <a:avLst>
+              <a:gd name="adj" fmla="val 4286"/>
+            </a:avLst>
+          </a:prstGeom>
+          <a:solidFill>
+            <a:srgbClr val="F7F3F8"/>
+          </a:solidFill>
+          <a:ln w="9525">
+            <a:solidFill>
+              <a:srgbClr val="E6DDE9"/>
+            </a:solidFill>
+            <a:prstDash val="solid"/>
+          </a:ln>
+        </p:spPr>
+      </p:sp>
+      <p:sp>
+        <p:nvSpPr>
+          <p:cNvPr id="10" name="Shape 8"/>
+          <p:cNvSpPr/>
+          <p:nvPr/>
+        </p:nvSpPr>
+        <p:spPr>
+          <a:xfrm>
+            <a:off x="6766560" y="2423160"/>
+            <a:ext cx="566928" cy="566928"/>
+          </a:xfrm>
+          <a:prstGeom prst="ellipse">
+            <a:avLst/>
+          </a:prstGeom>
+          <a:solidFill>
+            <a:srgbClr val="742774"/>
+          </a:solidFill>
+          <a:ln/>
+        </p:spPr>
+      </p:sp>
+      <p:sp>
+        <p:nvSpPr>
+          <p:cNvPr id="11" name="Text 9"/>
+          <p:cNvSpPr txBox="1"/>
+          <p:nvPr/>
+        </p:nvSpPr>
+        <p:spPr>
+          <a:xfrm>
+            <a:off x="6766560" y="2423160"/>
+            <a:ext cx="566928" cy="566928"/>
+          </a:xfrm>
+          <a:prstGeom prst="rect">
+            <a:avLst/>
+          </a:prstGeom>
+          <a:noFill/>
+          <a:ln/>
+        </p:spPr>
+        <p:txBody>
+          <a:bodyPr wrap="square" lIns="0" tIns="0" rIns="0" bIns="0" rtlCol="0" anchor="ctr"/>
+          <a:lstStyle/>
+          <a:p>
+            <a:pPr algn="ctr" indent="0" marL="0">
+              <a:buNone/>
+            </a:pPr>
+            <a:r>
+              <a:rPr lang="en-US" sz="1800" b="1" dirty="0">
+                <a:solidFill>
+                  <a:srgbClr val="FFFFFF"/>
+                </a:solidFill>
+                <a:latin typeface="Cambria" pitchFamily="34" charset="0"/>
+                <a:ea typeface="Cambria" pitchFamily="34" charset="-122"/>
+                <a:cs typeface="Cambria" pitchFamily="34" charset="-120"/>
+              </a:rPr>
+              <a:t>2</a:t>
+            </a:r>
+            <a:endParaRPr lang="en-US" sz="1800" dirty="0"/>
+          </a:p>
+        </p:txBody>
+      </p:sp>
+      <p:sp>
+        <p:nvSpPr>
+          <p:cNvPr id="12" name="Text 10"/>
+          <p:cNvSpPr txBox="1"/>
+          <p:nvPr/>
+        </p:nvSpPr>
+        <p:spPr>
+          <a:xfrm>
+            <a:off x="6766560" y="3108960"/>
+            <a:ext cx="4572000" cy="640080"/>
+          </a:xfrm>
+          <a:prstGeom prst="rect">
+            <a:avLst/>
+          </a:prstGeom>
+          <a:noFill/>
+          <a:ln/>
+        </p:spPr>
+        <p:txBody>
+          <a:bodyPr wrap="square" lIns="0" tIns="0" rIns="0" bIns="0" rtlCol="0" anchor="t"/>
+          <a:lstStyle/>
+          <a:p>
+            <a:pPr indent="0" marL="0">
+              <a:buNone/>
+            </a:pPr>
+            <a:r>
+              <a:rPr lang="en-US" sz="1800" b="1" dirty="0">
+                <a:solidFill>
+                  <a:srgbClr val="2E1437"/>
+                </a:solidFill>
+                <a:latin typeface="Cambria" pitchFamily="34" charset="0"/>
+                <a:ea typeface="Cambria" pitchFamily="34" charset="-122"/>
+                <a:cs typeface="Cambria" pitchFamily="34" charset="-120"/>
+              </a:rPr>
+              <a:t>¿Qué es la delegación?</a:t>
+            </a:r>
+            <a:endParaRPr lang="en-US" sz="1800" dirty="0"/>
+          </a:p>
+        </p:txBody>
+      </p:sp>
+      <p:sp>
+        <p:nvSpPr>
+          <p:cNvPr id="13" name="Text 11"/>
+          <p:cNvSpPr txBox="1"/>
+          <p:nvPr/>
+        </p:nvSpPr>
+        <p:spPr>
+          <a:xfrm>
+            <a:off x="6766560" y="3794760"/>
+            <a:ext cx="4572000" cy="1554480"/>
+          </a:xfrm>
+          <a:prstGeom prst="rect">
+            <a:avLst/>
+          </a:prstGeom>
+          <a:noFill/>
+          <a:ln/>
+        </p:spPr>
+        <p:txBody>
+          <a:bodyPr wrap="square" lIns="0" tIns="0" rIns="0" bIns="0" rtlCol="0" anchor="t"/>
+          <a:lstStyle/>
+          <a:p>
+            <a:pPr indent="0" marL="0">
+              <a:buNone/>
+            </a:pPr>
+            <a:r>
+              <a:rPr lang="en-US" sz="1350" dirty="0">
+                <a:solidFill>
+                  <a:srgbClr val="2B2B33"/>
+                </a:solidFill>
+                <a:latin typeface="Calibri" pitchFamily="34" charset="0"/>
+                <a:ea typeface="Calibri" pitchFamily="34" charset="-122"/>
+                <a:cs typeface="Calibri" pitchFamily="34" charset="-120"/>
+              </a:rPr>
+              <a:t>Tu galería filtra sobre 3.000 registros y solo ves unos cuantos. ¿Qué está pasando y qué función cambiarías?</a:t>
+            </a:r>
+            <a:endParaRPr lang="en-US" sz="1350" dirty="0"/>
+          </a:p>
+        </p:txBody>
+      </p:sp>
+      <p:sp>
+        <p:nvSpPr>
+          <p:cNvPr id="24" name="Text 22"/>
+          <p:cNvSpPr txBox="1"/>
+          <p:nvPr/>
+        </p:nvSpPr>
+        <p:spPr>
+          <a:xfrm>
+            <a:off x="548640" y="6473952"/>
+            <a:ext cx="8229600" cy="228600"/>
+          </a:xfrm>
+          <a:prstGeom prst="rect">
+            <a:avLst/>
+          </a:prstGeom>
+          <a:noFill/>
+          <a:ln/>
+        </p:spPr>
+        <p:txBody>
+          <a:bodyPr wrap="square" lIns="0" tIns="0" rIns="0" bIns="0" rtlCol="0" anchor="ctr"/>
+          <a:lstStyle/>
+          <a:p>
+            <a:pPr indent="0" marL="0">
+              <a:buNone/>
+            </a:pPr>
+            <a:r>
+              <a:rPr lang="en-US" sz="900" dirty="0">
+                <a:solidFill>
+                  <a:srgbClr val="6B6875"/>
+                </a:solidFill>
+                <a:latin typeface="Calibri" pitchFamily="34" charset="0"/>
+                <a:ea typeface="Calibri" pitchFamily="34" charset="-122"/>
+                <a:cs typeface="Calibri" pitchFamily="34" charset="-120"/>
+              </a:rPr>
+              <a:t>Curso Power Apps · Sesión 3 · Controles avanzados, integración y experiencia de usuario</a:t>
+            </a:r>
+            <a:endParaRPr lang="en-US" sz="900" dirty="0"/>
+          </a:p>
+        </p:txBody>
+      </p:sp>
+      <p:sp>
+        <p:nvSpPr>
+          <p:cNvPr id="25" name="Text 23"/>
+          <p:cNvSpPr txBox="1"/>
+          <p:nvPr/>
+        </p:nvSpPr>
+        <p:spPr>
+          <a:xfrm>
+            <a:off x="11185855" y="6473952"/>
+            <a:ext cx="457200" cy="228600"/>
+          </a:xfrm>
+          <a:prstGeom prst="rect">
+            <a:avLst/>
+          </a:prstGeom>
+          <a:noFill/>
+          <a:ln/>
+        </p:spPr>
+        <p:txBody>
+          <a:bodyPr wrap="square" lIns="0" tIns="0" rIns="0" bIns="0" rtlCol="0" anchor="ctr"/>
+          <a:lstStyle/>
+          <a:p>
+            <a:pPr algn="r" indent="0" marL="0">
+              <a:buNone/>
+            </a:pPr>
+            <a:r>
+              <a:rPr lang="en-US" sz="900" dirty="0">
+                <a:solidFill>
+                  <a:srgbClr val="6B6875"/>
+                </a:solidFill>
+                <a:latin typeface="Calibri" pitchFamily="34" charset="0"/>
+                <a:ea typeface="Calibri" pitchFamily="34" charset="-122"/>
+                <a:cs typeface="Calibri" pitchFamily="34" charset="-120"/>
+              </a:rPr>
+              <a:t>4</a:t>
             </a:r>
             <a:endParaRPr lang="en-US" sz="900" dirty="0"/>
           </a:p>
@@ -17742,7 +18347,7 @@
                 <a:ea typeface="Calibri" pitchFamily="34" charset="-122"/>
                 <a:cs typeface="Calibri" pitchFamily="34" charset="-120"/>
               </a:rPr>
-              <a:t>4</a:t>
+              <a:t>5</a:t>
             </a:r>
             <a:endParaRPr lang="en-US" sz="900" dirty="0"/>
           </a:p>
@@ -18138,7 +18743,7 @@
                 <a:ea typeface="Calibri" pitchFamily="34" charset="-122"/>
                 <a:cs typeface="Calibri" pitchFamily="34" charset="-120"/>
               </a:rPr>
-              <a:t>5</a:t>
+              <a:t>6</a:t>
             </a:r>
             <a:endParaRPr lang="en-US" sz="900" dirty="0"/>
           </a:p>
@@ -18617,7 +19222,7 @@
                 <a:ea typeface="Calibri" pitchFamily="34" charset="-122"/>
                 <a:cs typeface="Calibri" pitchFamily="34" charset="-120"/>
               </a:rPr>
-              <a:t>6</a:t>
+              <a:t>7</a:t>
             </a:r>
             <a:endParaRPr lang="en-US" sz="900" dirty="0"/>
           </a:p>
@@ -19461,7 +20066,7 @@
                 <a:ea typeface="Calibri" pitchFamily="34" charset="-122"/>
                 <a:cs typeface="Calibri" pitchFamily="34" charset="-120"/>
               </a:rPr>
-              <a:t>7</a:t>
+              <a:t>8</a:t>
             </a:r>
             <a:endParaRPr lang="en-US" sz="900" dirty="0"/>
           </a:p>
@@ -20044,7 +20649,7 @@
                 <a:ea typeface="Calibri" pitchFamily="34" charset="-122"/>
                 <a:cs typeface="Calibri" pitchFamily="34" charset="-120"/>
               </a:rPr>
-              <a:t>8</a:t>
+              <a:t>9</a:t>
             </a:r>
             <a:endParaRPr lang="en-US" sz="900" dirty="0"/>
           </a:p>
@@ -20363,7 +20968,7 @@
                 <a:ea typeface="Calibri" pitchFamily="34" charset="-122"/>
                 <a:cs typeface="Calibri" pitchFamily="34" charset="-120"/>
               </a:rPr>
-              <a:t>9</a:t>
+              <a:t>10</a:t>
             </a:r>
             <a:endParaRPr lang="en-US" sz="900" dirty="0"/>
           </a:p>

--- a/SESION_3/Sesion_3_Controles_avanzados_e_integracion.pptx
+++ b/SESION_3/Sesion_3_Controles_avanzados_e_integracion.pptx
@@ -3969,7 +3969,7 @@
                 <a:ea typeface="Calibri" pitchFamily="34" charset="-122"/>
                 <a:cs typeface="Calibri" pitchFamily="34" charset="-120"/>
               </a:rPr>
-              <a:t>Columnas obligatorias y validaciones de SharePoint o Dataverse. La última barrera.</a:t>
+              <a:t>Columnas obligatorias y validaciones del origen. Con Excel no existen: la app es la única barrera.</a:t>
             </a:r>
             <a:endParaRPr lang="en-US" sz="1350" dirty="0"/>
           </a:p>
@@ -17419,7 +17419,7 @@
                 <a:ea typeface="Cambria" pitchFamily="34" charset="-122"/>
                 <a:cs typeface="Cambria" pitchFamily="34" charset="-120"/>
               </a:rPr>
-              <a:t>SharePoint</a:t>
+              <a:t>Excel en OneDrive</a:t>
             </a:r>
             <a:endParaRPr lang="en-US" sz="1800" dirty="0"/>
           </a:p>
@@ -17458,7 +17458,7 @@
                 <a:ea typeface="Calibri" pitchFamily="34" charset="-122"/>
                 <a:cs typeface="Calibri" pitchFamily="34" charset="-120"/>
               </a:rPr>
-              <a:t>Listas como repositorio: columnas de elección con .Value y de persona.</a:t>
+              <a:t>Tablas como repositorio: todo llega como texto, sin tipos ni valores predeterminados.</a:t>
             </a:r>
             <a:endParaRPr lang="en-US" sz="1350" dirty="0"/>
           </a:p>
